--- a/lec/estr/estr1.pptx
+++ b/lec/estr/estr1.pptx
@@ -210,7 +210,7 @@
           <a:p>
             <a:fld id="{FFC7D3AA-8300-9049-A69D-2D2E45D1295F}" type="datetimeFigureOut">
               <a:rPr lang="en-US" smtClean="0"/>
-              <a:t>9/1/25</a:t>
+              <a:t>9/2/25</a:t>
             </a:fld>
             <a:endParaRPr lang="en-US"/>
           </a:p>
@@ -2064,7 +2064,7 @@
           <a:p>
             <a:fld id="{7F89D1EE-A1D1-694C-80C1-6E001F76F094}" type="datetimeFigureOut">
               <a:rPr lang="en-US" smtClean="0"/>
-              <a:t>9/1/25</a:t>
+              <a:t>9/2/25</a:t>
             </a:fld>
             <a:endParaRPr lang="en-US"/>
           </a:p>
@@ -2262,7 +2262,7 @@
           <a:p>
             <a:fld id="{7F89D1EE-A1D1-694C-80C1-6E001F76F094}" type="datetimeFigureOut">
               <a:rPr lang="en-US" smtClean="0"/>
-              <a:t>9/1/25</a:t>
+              <a:t>9/2/25</a:t>
             </a:fld>
             <a:endParaRPr lang="en-US"/>
           </a:p>
@@ -2470,7 +2470,7 @@
           <a:p>
             <a:fld id="{7F89D1EE-A1D1-694C-80C1-6E001F76F094}" type="datetimeFigureOut">
               <a:rPr lang="en-US" smtClean="0"/>
-              <a:t>9/1/25</a:t>
+              <a:t>9/2/25</a:t>
             </a:fld>
             <a:endParaRPr lang="en-US"/>
           </a:p>
@@ -2668,7 +2668,7 @@
           <a:p>
             <a:fld id="{7F89D1EE-A1D1-694C-80C1-6E001F76F094}" type="datetimeFigureOut">
               <a:rPr lang="en-US" smtClean="0"/>
-              <a:t>9/1/25</a:t>
+              <a:t>9/2/25</a:t>
             </a:fld>
             <a:endParaRPr lang="en-US"/>
           </a:p>
@@ -2943,7 +2943,7 @@
           <a:p>
             <a:fld id="{7F89D1EE-A1D1-694C-80C1-6E001F76F094}" type="datetimeFigureOut">
               <a:rPr lang="en-US" smtClean="0"/>
-              <a:t>9/1/25</a:t>
+              <a:t>9/2/25</a:t>
             </a:fld>
             <a:endParaRPr lang="en-US"/>
           </a:p>
@@ -3208,7 +3208,7 @@
           <a:p>
             <a:fld id="{7F89D1EE-A1D1-694C-80C1-6E001F76F094}" type="datetimeFigureOut">
               <a:rPr lang="en-US" smtClean="0"/>
-              <a:t>9/1/25</a:t>
+              <a:t>9/2/25</a:t>
             </a:fld>
             <a:endParaRPr lang="en-US"/>
           </a:p>
@@ -3620,7 +3620,7 @@
           <a:p>
             <a:fld id="{7F89D1EE-A1D1-694C-80C1-6E001F76F094}" type="datetimeFigureOut">
               <a:rPr lang="en-US" smtClean="0"/>
-              <a:t>9/1/25</a:t>
+              <a:t>9/2/25</a:t>
             </a:fld>
             <a:endParaRPr lang="en-US"/>
           </a:p>
@@ -3761,7 +3761,7 @@
           <a:p>
             <a:fld id="{7F89D1EE-A1D1-694C-80C1-6E001F76F094}" type="datetimeFigureOut">
               <a:rPr lang="en-US" smtClean="0"/>
-              <a:t>9/1/25</a:t>
+              <a:t>9/2/25</a:t>
             </a:fld>
             <a:endParaRPr lang="en-US"/>
           </a:p>
@@ -3874,7 +3874,7 @@
           <a:p>
             <a:fld id="{7F89D1EE-A1D1-694C-80C1-6E001F76F094}" type="datetimeFigureOut">
               <a:rPr lang="en-US" smtClean="0"/>
-              <a:t>9/1/25</a:t>
+              <a:t>9/2/25</a:t>
             </a:fld>
             <a:endParaRPr lang="en-US"/>
           </a:p>
@@ -4185,7 +4185,7 @@
           <a:p>
             <a:fld id="{7F89D1EE-A1D1-694C-80C1-6E001F76F094}" type="datetimeFigureOut">
               <a:rPr lang="en-US" smtClean="0"/>
-              <a:t>9/1/25</a:t>
+              <a:t>9/2/25</a:t>
             </a:fld>
             <a:endParaRPr lang="en-US"/>
           </a:p>
@@ -4473,7 +4473,7 @@
           <a:p>
             <a:fld id="{7F89D1EE-A1D1-694C-80C1-6E001F76F094}" type="datetimeFigureOut">
               <a:rPr lang="en-US" smtClean="0"/>
-              <a:t>9/1/25</a:t>
+              <a:t>9/2/25</a:t>
             </a:fld>
             <a:endParaRPr lang="en-US"/>
           </a:p>
@@ -4714,7 +4714,7 @@
           <a:p>
             <a:fld id="{7F89D1EE-A1D1-694C-80C1-6E001F76F094}" type="datetimeFigureOut">
               <a:rPr lang="en-US" smtClean="0"/>
-              <a:t>9/1/25</a:t>
+              <a:t>9/2/25</a:t>
             </a:fld>
             <a:endParaRPr lang="en-US"/>
           </a:p>
@@ -12254,7 +12254,9 @@
         </p:nvSpPr>
         <p:spPr/>
         <p:txBody>
-          <a:bodyPr/>
+          <a:bodyPr>
+            <a:normAutofit lnSpcReduction="10000"/>
+          </a:bodyPr>
           <a:lstStyle/>
           <a:p>
             <a:r>
@@ -12275,7 +12277,7 @@
             </a:r>
             <a:r>
               <a:rPr lang="en-US" altLang="zh-CN" dirty="0"/>
-              <a:t>5%</a:t>
+              <a:t>10%</a:t>
             </a:r>
             <a:r>
               <a:rPr lang="zh-CN" altLang="en-US" dirty="0"/>
@@ -12347,6 +12349,28 @@
             <a:r>
               <a:rPr lang="en-US" altLang="zh-CN" dirty="0"/>
               <a:t>topics</a:t>
+            </a:r>
+          </a:p>
+          <a:p>
+            <a:r>
+              <a:rPr lang="en-US" altLang="zh-CN" dirty="0"/>
+              <a:t>Final</a:t>
+            </a:r>
+            <a:r>
+              <a:rPr lang="zh-CN" altLang="en-US" dirty="0"/>
+              <a:t> </a:t>
+            </a:r>
+            <a:r>
+              <a:rPr lang="en-US" altLang="zh-CN" dirty="0"/>
+              <a:t>exam:</a:t>
+            </a:r>
+            <a:r>
+              <a:rPr lang="zh-CN" altLang="en-US" dirty="0"/>
+              <a:t> </a:t>
+            </a:r>
+            <a:r>
+              <a:rPr lang="en-US" altLang="zh-CN" dirty="0"/>
+              <a:t>35%</a:t>
             </a:r>
           </a:p>
           <a:p>
@@ -14658,14 +14682,14 @@
             </a:ln>
             <a:extLst>
               <a:ext uri="{909E8E84-426E-40dd-AFC4-6F175D3DCCD1}">
-                <a14:hiddenFill xmlns="" xmlns:a14="http://schemas.microsoft.com/office/drawing/2010/main">
+                <a14:hiddenFill xmlns:a14="http://schemas.microsoft.com/office/drawing/2010/main" xmlns="">
                   <a:solidFill>
                     <a:srgbClr val="FFFFFF"/>
                   </a:solidFill>
                 </a14:hiddenFill>
               </a:ext>
               <a:ext uri="{91240B29-F687-4f45-9708-019B960494DF}">
-                <a14:hiddenLine xmlns="" xmlns:a14="http://schemas.microsoft.com/office/drawing/2010/main" w="9525">
+                <a14:hiddenLine xmlns:a14="http://schemas.microsoft.com/office/drawing/2010/main" xmlns="" w="9525">
                   <a:solidFill>
                     <a:srgbClr val="000000"/>
                   </a:solidFill>
